--- a/theory/Презентация защита.pptx
+++ b/theory/Презентация защита.pptx
@@ -21,23 +21,16 @@
   <p:notesSz cx="6858000" cy="12192000"/>
   <p:embeddedFontLst>
     <p:embeddedFont>
-      <p:font typeface="Calibri" panose="020F0502020204030204" pitchFamily="34" charset="0"/>
+      <p:font typeface="Fira Mono" panose="020B0509050000020004" pitchFamily="49" charset="0"/>
       <p:regular r:id="rId11"/>
-      <p:bold r:id="rId12"/>
-      <p:italic r:id="rId13"/>
-      <p:boldItalic r:id="rId14"/>
     </p:embeddedFont>
     <p:embeddedFont>
-      <p:font typeface="Fira Sans SemiBold" panose="020B0604020202020204" charset="0"/>
-      <p:regular r:id="rId15"/>
+      <p:font typeface="Fira Sans" panose="020B0503050000020004" pitchFamily="34" charset="0"/>
+      <p:regular r:id="rId12"/>
     </p:embeddedFont>
     <p:embeddedFont>
-      <p:font typeface="Fira Sans" panose="020B0604020202020204" charset="0"/>
-      <p:regular r:id="rId16"/>
-    </p:embeddedFont>
-    <p:embeddedFont>
-      <p:font typeface="Fira Mono" panose="020B0604020202020204" charset="0"/>
-      <p:regular r:id="rId17"/>
+      <p:font typeface="Fira Sans SemiBold" panose="020B0603050000020004" pitchFamily="34" charset="0"/>
+      <p:regular r:id="rId13"/>
     </p:embeddedFont>
   </p:embeddedFontLst>
   <p:defaultTextStyle>
@@ -1405,7 +1398,7 @@
         </p:spPr>
         <p:txBody>
           <a:bodyPr wrap="square" lIns="0" tIns="0" rIns="0" bIns="0" rtlCol="0" anchor="t">
-            <a:normAutofit lnSpcReduction="10000"/>
+            <a:normAutofit/>
           </a:bodyPr>
           <a:lstStyle/>
           <a:p>
@@ -1489,7 +1482,7 @@
         </p:spPr>
         <p:txBody>
           <a:bodyPr wrap="square" lIns="0" tIns="0" rIns="0" bIns="0" rtlCol="0" anchor="t">
-            <a:normAutofit lnSpcReduction="10000"/>
+            <a:normAutofit/>
           </a:bodyPr>
           <a:lstStyle/>
           <a:p>
@@ -1540,7 +1533,7 @@
               <a:buNone/>
             </a:pPr>
             <a:r>
-              <a:rPr lang="ru-RU" sz="1450" dirty="0" smtClean="0">
+              <a:rPr lang="ru-RU" sz="1450" dirty="0">
                 <a:solidFill>
                   <a:srgbClr val="22252A"/>
                 </a:solidFill>
@@ -1551,7 +1544,7 @@
               <a:t>Гусаров</a:t>
             </a:r>
             <a:r>
-              <a:rPr lang="en-US" sz="1450" dirty="0" smtClean="0">
+              <a:rPr lang="en-US" sz="1450" dirty="0">
                 <a:solidFill>
                   <a:srgbClr val="22252A"/>
                 </a:solidFill>
@@ -1562,7 +1555,7 @@
               <a:t> </a:t>
             </a:r>
             <a:r>
-              <a:rPr lang="ru-RU" sz="1450" dirty="0" smtClean="0">
+              <a:rPr lang="ru-RU" sz="1450" dirty="0">
                 <a:solidFill>
                   <a:srgbClr val="22252A"/>
                 </a:solidFill>
@@ -1573,7 +1566,7 @@
               <a:t>А</a:t>
             </a:r>
             <a:r>
-              <a:rPr lang="en-US" sz="1450" dirty="0" smtClean="0">
+              <a:rPr lang="en-US" sz="1450" dirty="0">
                 <a:solidFill>
                   <a:srgbClr val="22252A"/>
                 </a:solidFill>
@@ -1584,7 +1577,7 @@
               <a:t>.</a:t>
             </a:r>
             <a:r>
-              <a:rPr lang="ru-RU" sz="1450" dirty="0" smtClean="0">
+              <a:rPr lang="ru-RU" sz="1450" dirty="0">
                 <a:solidFill>
                   <a:srgbClr val="22252A"/>
                 </a:solidFill>
@@ -1595,7 +1588,7 @@
               <a:t>С</a:t>
             </a:r>
             <a:r>
-              <a:rPr lang="en-US" sz="1450" dirty="0" smtClean="0">
+              <a:rPr lang="en-US" sz="1450" dirty="0">
                 <a:solidFill>
                   <a:srgbClr val="22252A"/>
                 </a:solidFill>
@@ -1615,7 +1608,7 @@
               <a:buNone/>
             </a:pPr>
             <a:r>
-              <a:rPr lang="ru-RU" sz="1450" dirty="0" smtClean="0">
+              <a:rPr lang="ru-RU" sz="1450" dirty="0">
                 <a:solidFill>
                   <a:srgbClr val="22252A"/>
                 </a:solidFill>
@@ -1626,7 +1619,7 @@
               <a:t>Покусаев</a:t>
             </a:r>
             <a:r>
-              <a:rPr lang="en-US" sz="1450" dirty="0" smtClean="0">
+              <a:rPr lang="en-US" sz="1450" dirty="0">
                 <a:solidFill>
                   <a:srgbClr val="22252A"/>
                 </a:solidFill>
@@ -1637,7 +1630,7 @@
               <a:t> </a:t>
             </a:r>
             <a:r>
-              <a:rPr lang="ru-RU" sz="1450" dirty="0" smtClean="0">
+              <a:rPr lang="ru-RU" sz="1450" dirty="0">
                 <a:solidFill>
                   <a:srgbClr val="22252A"/>
                 </a:solidFill>
@@ -1648,7 +1641,7 @@
               <a:t>И</a:t>
             </a:r>
             <a:r>
-              <a:rPr lang="en-US" sz="1450" dirty="0" smtClean="0">
+              <a:rPr lang="en-US" sz="1450" dirty="0">
                 <a:solidFill>
                   <a:srgbClr val="22252A"/>
                 </a:solidFill>
@@ -1659,7 +1652,7 @@
               <a:t>.</a:t>
             </a:r>
             <a:r>
-              <a:rPr lang="ru-RU" sz="1450" dirty="0" smtClean="0">
+              <a:rPr lang="ru-RU" sz="1450" dirty="0">
                 <a:solidFill>
                   <a:srgbClr val="22252A"/>
                 </a:solidFill>
@@ -1670,7 +1663,7 @@
               <a:t>А</a:t>
             </a:r>
             <a:r>
-              <a:rPr lang="en-US" sz="1450" dirty="0" smtClean="0">
+              <a:rPr lang="en-US" sz="1450" dirty="0">
                 <a:solidFill>
                   <a:srgbClr val="22252A"/>
                 </a:solidFill>
@@ -2090,7 +2083,7 @@
         </p:spPr>
         <p:txBody>
           <a:bodyPr wrap="square" lIns="0" tIns="0" rIns="0" bIns="0" rtlCol="0" anchor="t">
-            <a:normAutofit lnSpcReduction="10000"/>
+            <a:normAutofit/>
           </a:bodyPr>
           <a:lstStyle/>
           <a:p>
@@ -2176,7 +2169,7 @@
         </p:spPr>
         <p:txBody>
           <a:bodyPr wrap="square" lIns="0" tIns="0" rIns="0" bIns="0" rtlCol="0" anchor="t">
-            <a:normAutofit lnSpcReduction="10000"/>
+            <a:normAutofit/>
           </a:bodyPr>
           <a:lstStyle/>
           <a:p>
@@ -2262,7 +2255,7 @@
         </p:spPr>
         <p:txBody>
           <a:bodyPr wrap="square" lIns="0" tIns="0" rIns="0" bIns="0" rtlCol="0" anchor="t">
-            <a:normAutofit lnSpcReduction="10000"/>
+            <a:normAutofit/>
           </a:bodyPr>
           <a:lstStyle/>
           <a:p>
@@ -2348,7 +2341,7 @@
         </p:spPr>
         <p:txBody>
           <a:bodyPr wrap="square" lIns="0" tIns="0" rIns="0" bIns="0" rtlCol="0" anchor="t">
-            <a:normAutofit lnSpcReduction="10000"/>
+            <a:normAutofit/>
           </a:bodyPr>
           <a:lstStyle/>
           <a:p>
@@ -3556,7 +3549,7 @@
         </p:spPr>
         <p:txBody>
           <a:bodyPr wrap="square" lIns="0" tIns="0" rIns="0" bIns="0" rtlCol="0" anchor="t">
-            <a:normAutofit lnSpcReduction="10000"/>
+            <a:normAutofit/>
           </a:bodyPr>
           <a:lstStyle/>
           <a:p>
@@ -3642,7 +3635,7 @@
         </p:spPr>
         <p:txBody>
           <a:bodyPr wrap="square" lIns="0" tIns="0" rIns="0" bIns="0" rtlCol="0" anchor="t">
-            <a:normAutofit lnSpcReduction="10000"/>
+            <a:normAutofit/>
           </a:bodyPr>
           <a:lstStyle/>
           <a:p>
@@ -3728,7 +3721,7 @@
         </p:spPr>
         <p:txBody>
           <a:bodyPr wrap="square" lIns="0" tIns="0" rIns="0" bIns="0" rtlCol="0" anchor="t">
-            <a:normAutofit lnSpcReduction="10000"/>
+            <a:normAutofit/>
           </a:bodyPr>
           <a:lstStyle/>
           <a:p>
@@ -4714,7 +4707,7 @@
         </p:spPr>
         <p:txBody>
           <a:bodyPr wrap="square" lIns="0" tIns="0" rIns="0" bIns="0" rtlCol="0" anchor="t">
-            <a:normAutofit lnSpcReduction="10000"/>
+            <a:normAutofit/>
           </a:bodyPr>
           <a:lstStyle/>
           <a:p>
@@ -4864,7 +4857,7 @@
         </p:spPr>
         <p:txBody>
           <a:bodyPr wrap="square" lIns="0" tIns="0" rIns="0" bIns="0" rtlCol="0" anchor="t">
-            <a:normAutofit lnSpcReduction="10000"/>
+            <a:normAutofit/>
           </a:bodyPr>
           <a:lstStyle/>
           <a:p>
@@ -5143,7 +5136,7 @@
         </p:spPr>
         <p:txBody>
           <a:bodyPr wrap="square" lIns="0" tIns="0" rIns="0" bIns="0" rtlCol="0" anchor="t">
-            <a:normAutofit lnSpcReduction="10000"/>
+            <a:normAutofit/>
           </a:bodyPr>
           <a:lstStyle/>
           <a:p>
@@ -5251,7 +5244,7 @@
         </p:spPr>
         <p:txBody>
           <a:bodyPr wrap="square" lIns="0" tIns="0" rIns="0" bIns="0" rtlCol="0" anchor="t">
-            <a:normAutofit lnSpcReduction="10000"/>
+            <a:normAutofit/>
           </a:bodyPr>
           <a:lstStyle/>
           <a:p>
@@ -5337,7 +5330,7 @@
         </p:spPr>
         <p:txBody>
           <a:bodyPr wrap="square" lIns="0" tIns="0" rIns="0" bIns="0" rtlCol="0" anchor="t">
-            <a:normAutofit lnSpcReduction="10000"/>
+            <a:normAutofit/>
           </a:bodyPr>
           <a:lstStyle/>
           <a:p>
@@ -5445,7 +5438,7 @@
         </p:spPr>
         <p:txBody>
           <a:bodyPr wrap="square" lIns="0" tIns="0" rIns="0" bIns="0" rtlCol="0" anchor="t">
-            <a:normAutofit lnSpcReduction="10000"/>
+            <a:normAutofit/>
           </a:bodyPr>
           <a:lstStyle/>
           <a:p>
@@ -5778,60 +5771,7 @@
               </a:lnSpc>
               <a:buNone/>
             </a:pPr>
-            <a:r>
-              <a:rPr lang="en-US" sz="11200" kern="100" spc="-224" dirty="0">
-                <a:solidFill>
-                  <a:srgbClr val="0052CC"/>
-                </a:solidFill>
-                <a:latin typeface="Fira Mono" pitchFamily="34" charset="0"/>
-                <a:ea typeface="Fira Mono" pitchFamily="34" charset="-122"/>
-                <a:cs typeface="Fira Mono" pitchFamily="34" charset="-120"/>
-              </a:rPr>
-              <a:t>12</a:t>
-            </a:r>
             <a:endParaRPr lang="en-US" sz="11200" dirty="0"/>
-          </a:p>
-        </p:txBody>
-      </p:sp>
-      <p:sp>
-        <p:nvSpPr>
-          <p:cNvPr id="7" name="Text 5"/>
-          <p:cNvSpPr/>
-          <p:nvPr/>
-        </p:nvSpPr>
-        <p:spPr>
-          <a:xfrm>
-            <a:off x="7772206" y="3710999"/>
-            <a:ext cx="3962301" cy="379710"/>
-          </a:xfrm>
-          <a:prstGeom prst="rect">
-            <a:avLst/>
-          </a:prstGeom>
-          <a:noFill/>
-          <a:ln/>
-        </p:spPr>
-        <p:txBody>
-          <a:bodyPr wrap="none" lIns="0" tIns="0" rIns="0" bIns="0" rtlCol="0" anchor="t"/>
-          <a:lstStyle/>
-          <a:p>
-            <a:pPr marL="0" indent="0" algn="l">
-              <a:lnSpc>
-                <a:spcPct val="108000"/>
-              </a:lnSpc>
-              <a:buNone/>
-            </a:pPr>
-            <a:r>
-              <a:rPr lang="en-US" sz="2300" dirty="0">
-                <a:solidFill>
-                  <a:srgbClr val="22252A"/>
-                </a:solidFill>
-                <a:latin typeface="Fira Sans" pitchFamily="34" charset="0"/>
-                <a:ea typeface="Fira Sans" pitchFamily="34" charset="-122"/>
-                <a:cs typeface="Fira Sans" pitchFamily="34" charset="-120"/>
-              </a:rPr>
-              <a:t>столов</a:t>
-            </a:r>
-            <a:endParaRPr lang="en-US" sz="2300" dirty="0"/>
           </a:p>
         </p:txBody>
       </p:sp>
@@ -5854,7 +5794,7 @@
         </p:spPr>
         <p:txBody>
           <a:bodyPr wrap="square" lIns="0" tIns="0" rIns="0" bIns="0" rtlCol="0" anchor="t">
-            <a:normAutofit lnSpcReduction="10000"/>
+            <a:normAutofit/>
           </a:bodyPr>
           <a:lstStyle/>
           <a:p>
@@ -5864,17 +5804,6 @@
               </a:lnSpc>
               <a:buNone/>
             </a:pPr>
-            <a:r>
-              <a:rPr lang="en-US" sz="1700" dirty="0">
-                <a:solidFill>
-                  <a:srgbClr val="22252A"/>
-                </a:solidFill>
-                <a:latin typeface="Fira Sans" pitchFamily="34" charset="0"/>
-                <a:ea typeface="Fira Sans" pitchFamily="34" charset="-122"/>
-                <a:cs typeface="Fira Sans" pitchFamily="34" charset="-120"/>
-              </a:rPr>
-              <a:t>Целевой масштаб локального развертывания в кафе «Причал».</a:t>
-            </a:r>
             <a:endParaRPr lang="en-US" sz="1700" dirty="0"/>
           </a:p>
         </p:txBody>
@@ -5959,6 +5888,66 @@
           <a:xfrm>
             <a:off x="11010735" y="6531570"/>
             <a:ext cx="1181265" cy="323895"/>
+          </a:xfrm>
+          <a:prstGeom prst="rect">
+            <a:avLst/>
+          </a:prstGeom>
+        </p:spPr>
+      </p:pic>
+      <p:pic>
+        <p:nvPicPr>
+          <p:cNvPr id="13" name="Рисунок 12">
+            <a:extLst>
+              <a:ext uri="{FF2B5EF4-FFF2-40B4-BE49-F238E27FC236}">
+                <a16:creationId xmlns:a16="http://schemas.microsoft.com/office/drawing/2014/main" id="{F4276730-C541-7144-14DA-1B73B9C71B6A}"/>
+              </a:ext>
+            </a:extLst>
+          </p:cNvPr>
+          <p:cNvPicPr>
+            <a:picLocks noChangeAspect="1"/>
+          </p:cNvPicPr>
+          <p:nvPr/>
+        </p:nvPicPr>
+        <p:blipFill>
+          <a:blip r:embed="rId4"/>
+          <a:stretch>
+            <a:fillRect/>
+          </a:stretch>
+        </p:blipFill>
+        <p:spPr>
+          <a:xfrm>
+            <a:off x="7544916" y="73479"/>
+            <a:ext cx="4416879" cy="4416879"/>
+          </a:xfrm>
+          <a:prstGeom prst="rect">
+            <a:avLst/>
+          </a:prstGeom>
+        </p:spPr>
+      </p:pic>
+      <p:pic>
+        <p:nvPicPr>
+          <p:cNvPr id="15" name="Рисунок 14">
+            <a:extLst>
+              <a:ext uri="{FF2B5EF4-FFF2-40B4-BE49-F238E27FC236}">
+                <a16:creationId xmlns:a16="http://schemas.microsoft.com/office/drawing/2014/main" id="{BA7E6F27-9B35-374D-E954-1FD821F70468}"/>
+              </a:ext>
+            </a:extLst>
+          </p:cNvPr>
+          <p:cNvPicPr>
+            <a:picLocks noChangeAspect="1"/>
+          </p:cNvPicPr>
+          <p:nvPr/>
+        </p:nvPicPr>
+        <p:blipFill>
+          <a:blip r:embed="rId5"/>
+          <a:stretch>
+            <a:fillRect/>
+          </a:stretch>
+        </p:blipFill>
+        <p:spPr>
+          <a:xfrm>
+            <a:off x="8879486" y="4653062"/>
+            <a:ext cx="1747738" cy="1747738"/>
           </a:xfrm>
           <a:prstGeom prst="rect">
             <a:avLst/>
